--- a/was-ist-ein-coding-dojo.pptx
+++ b/was-ist-ein-coding-dojo.pptx
@@ -294,7 +294,7 @@
           <a:p>
             <a:fld id="{957D6DC5-306E-4ABC-9AC8-E2C0D65491EF}" type="datetimeFigureOut">
               <a:rPr lang="de-DE" smtClean="0"/>
-              <a:t>06.06.2025</a:t>
+              <a:t>12.06.2025</a:t>
             </a:fld>
             <a:endParaRPr lang="de-DE"/>
           </a:p>
@@ -471,7 +471,7 @@
           <a:p>
             <a:fld id="{2B052A35-9683-4BC0-AC46-092FDEE29B6E}" type="datetimeFigureOut">
               <a:rPr lang="de-DE" smtClean="0"/>
-              <a:t>06.06.2025</a:t>
+              <a:t>12.06.2025</a:t>
             </a:fld>
             <a:endParaRPr lang="de-DE"/>
           </a:p>
@@ -1537,7 +1537,7 @@
           <a:p>
             <a:fld id="{C54686FD-27CA-4264-A447-00CC3C9742ED}" type="datetime1">
               <a:rPr lang="de-DE" smtClean="0"/>
-              <a:t>06.06.2025</a:t>
+              <a:t>12.06.2025</a:t>
             </a:fld>
             <a:endParaRPr lang="de-DE" dirty="0"/>
           </a:p>
@@ -2289,7 +2289,7 @@
           <a:p>
             <a:fld id="{3D965A5E-C463-4E85-9592-0F17DD732390}" type="datetime1">
               <a:rPr lang="de-DE" smtClean="0"/>
-              <a:t>06.06.2025</a:t>
+              <a:t>12.06.2025</a:t>
             </a:fld>
             <a:endParaRPr lang="de-DE" dirty="0"/>
           </a:p>
@@ -2425,7 +2425,7 @@
           <a:p>
             <a:fld id="{EA33749F-693F-4A8B-AD1F-042F2F274E90}" type="datetime1">
               <a:rPr lang="de-DE" smtClean="0"/>
-              <a:t>06.06.2025</a:t>
+              <a:t>12.06.2025</a:t>
             </a:fld>
             <a:endParaRPr lang="de-DE" dirty="0"/>
           </a:p>
@@ -3129,7 +3129,7 @@
           <a:p>
             <a:fld id="{0610130C-7944-4BC2-9A97-BBE6081083DB}" type="datetime1">
               <a:rPr lang="de-DE" smtClean="0"/>
-              <a:t>06.06.2025</a:t>
+              <a:t>12.06.2025</a:t>
             </a:fld>
             <a:endParaRPr lang="de-DE" dirty="0"/>
           </a:p>
@@ -3424,7 +3424,7 @@
           <a:p>
             <a:fld id="{94FFB94A-3D39-4929-B688-1FEC69F38511}" type="datetime1">
               <a:rPr lang="de-DE" smtClean="0"/>
-              <a:t>06.06.2025</a:t>
+              <a:t>12.06.2025</a:t>
             </a:fld>
             <a:endParaRPr lang="de-DE" dirty="0"/>
           </a:p>
@@ -3872,7 +3872,7 @@
           <a:p>
             <a:fld id="{ABF0CCA0-3537-474F-AE4F-50DB31F53970}" type="datetime1">
               <a:rPr lang="de-DE" smtClean="0"/>
-              <a:t>06.06.2025</a:t>
+              <a:t>12.06.2025</a:t>
             </a:fld>
             <a:endParaRPr lang="de-DE" dirty="0"/>
           </a:p>
@@ -4274,7 +4274,7 @@
           <a:p>
             <a:fld id="{2196F416-5FE8-4978-BB70-45A780668996}" type="datetime1">
               <a:rPr lang="de-DE" smtClean="0"/>
-              <a:t>06.06.2025</a:t>
+              <a:t>12.06.2025</a:t>
             </a:fld>
             <a:endParaRPr lang="de-DE" dirty="0"/>
           </a:p>
@@ -4838,7 +4838,7 @@
           <a:p>
             <a:fld id="{897A5482-8DD3-4A2F-8052-E4D73B7FB815}" type="datetime1">
               <a:rPr lang="de-DE" smtClean="0"/>
-              <a:t>06.06.2025</a:t>
+              <a:t>12.06.2025</a:t>
             </a:fld>
             <a:endParaRPr lang="de-DE" dirty="0"/>
           </a:p>
@@ -5295,7 +5295,7 @@
           <a:p>
             <a:fld id="{2811867F-6609-430E-8E46-93FA078043F9}" type="datetime1">
               <a:rPr lang="de-DE" smtClean="0"/>
-              <a:t>06.06.2025</a:t>
+              <a:t>12.06.2025</a:t>
             </a:fld>
             <a:endParaRPr lang="de-DE" dirty="0"/>
           </a:p>
@@ -5832,7 +5832,7 @@
           <a:p>
             <a:fld id="{C816E7EE-D71F-4813-B3C4-79CC1FDB86FD}" type="datetime1">
               <a:rPr lang="de-DE" smtClean="0"/>
-              <a:t>06.06.2025</a:t>
+              <a:t>12.06.2025</a:t>
             </a:fld>
             <a:endParaRPr lang="de-DE" dirty="0"/>
           </a:p>
@@ -6677,7 +6677,7 @@
           <a:p>
             <a:fld id="{1E5347CC-51E0-4888-A1E2-77457BC79666}" type="datetime1">
               <a:rPr lang="de-DE" smtClean="0"/>
-              <a:t>06.06.2025</a:t>
+              <a:t>12.06.2025</a:t>
             </a:fld>
             <a:endParaRPr lang="de-DE" dirty="0"/>
           </a:p>
@@ -7167,7 +7167,7 @@
           <a:p>
             <a:fld id="{CB735FD0-6D1F-4C20-8240-E620B4515DA4}" type="datetime1">
               <a:rPr lang="de-DE" smtClean="0"/>
-              <a:t>06.06.2025</a:t>
+              <a:t>12.06.2025</a:t>
             </a:fld>
             <a:endParaRPr lang="de-DE" dirty="0"/>
           </a:p>
@@ -7815,7 +7815,7 @@
           <a:p>
             <a:fld id="{B8A3C1FD-6FBC-40B2-88F5-F3E61E8EEBF0}" type="datetime1">
               <a:rPr lang="de-DE" smtClean="0"/>
-              <a:t>06.06.2025</a:t>
+              <a:t>12.06.2025</a:t>
             </a:fld>
             <a:endParaRPr lang="de-DE" dirty="0"/>
           </a:p>
@@ -8406,7 +8406,7 @@
           <a:p>
             <a:fld id="{AF1CC51D-1C22-4CF3-8FD3-18250F190113}" type="datetime1">
               <a:rPr lang="de-DE" smtClean="0"/>
-              <a:t>06.06.2025</a:t>
+              <a:t>12.06.2025</a:t>
             </a:fld>
             <a:endParaRPr lang="de-DE" dirty="0"/>
           </a:p>
@@ -8905,7 +8905,7 @@
           <a:p>
             <a:fld id="{843C3ECC-28BA-4648-A791-48E762D6A652}" type="datetime1">
               <a:rPr lang="de-DE" smtClean="0"/>
-              <a:t>06.06.2025</a:t>
+              <a:t>12.06.2025</a:t>
             </a:fld>
             <a:endParaRPr lang="de-DE" dirty="0"/>
           </a:p>
@@ -9750,7 +9750,7 @@
           <a:p>
             <a:fld id="{D4078B34-1100-4057-AC85-2D835B7BBC46}" type="datetime1">
               <a:rPr lang="de-DE" smtClean="0"/>
-              <a:t>06.06.2025</a:t>
+              <a:t>12.06.2025</a:t>
             </a:fld>
             <a:endParaRPr lang="de-DE" dirty="0"/>
           </a:p>
@@ -10311,7 +10311,7 @@
           <a:p>
             <a:fld id="{62E99009-138A-4843-A2F8-8E923EF61B41}" type="datetime1">
               <a:rPr lang="de-DE" smtClean="0"/>
-              <a:t>06.06.2025</a:t>
+              <a:t>12.06.2025</a:t>
             </a:fld>
             <a:endParaRPr lang="de-DE" dirty="0"/>
           </a:p>
@@ -10498,7 +10498,7 @@
           <a:p>
             <a:fld id="{BAB53D6C-4676-4A04-907A-7B3E00E1C1AD}" type="datetime1">
               <a:rPr lang="de-DE" smtClean="0"/>
-              <a:t>06.06.2025</a:t>
+              <a:t>12.06.2025</a:t>
             </a:fld>
             <a:endParaRPr lang="de-DE" dirty="0"/>
           </a:p>
@@ -11322,7 +11322,7 @@
           <a:p>
             <a:fld id="{0B8A382A-7EAA-4F63-8582-9328F93E5971}" type="datetime1">
               <a:rPr lang="de-DE" smtClean="0"/>
-              <a:t>06.06.2025</a:t>
+              <a:t>12.06.2025</a:t>
             </a:fld>
             <a:endParaRPr lang="de-DE" dirty="0"/>
           </a:p>
@@ -11740,7 +11740,7 @@
           <a:p>
             <a:fld id="{0C9F6CE3-EA10-4BD8-B1B5-D51137E37B62}" type="datetime1">
               <a:rPr lang="de-DE" smtClean="0"/>
-              <a:t>06.06.2025</a:t>
+              <a:t>12.06.2025</a:t>
             </a:fld>
             <a:endParaRPr lang="de-DE" dirty="0"/>
           </a:p>
@@ -12017,7 +12017,7 @@
           <a:p>
             <a:fld id="{0B3ED860-F659-4DA4-A4D1-650787465D35}" type="datetime1">
               <a:rPr lang="de-DE" smtClean="0"/>
-              <a:t>06.06.2025</a:t>
+              <a:t>12.06.2025</a:t>
             </a:fld>
             <a:endParaRPr lang="de-DE" dirty="0"/>
           </a:p>
@@ -12799,7 +12799,7 @@
           <a:p>
             <a:fld id="{0C9F6CE3-EA10-4BD8-B1B5-D51137E37B62}" type="datetime1">
               <a:rPr lang="de-DE" smtClean="0"/>
-              <a:t>06.06.2025</a:t>
+              <a:t>12.06.2025</a:t>
             </a:fld>
             <a:endParaRPr lang="de-DE" dirty="0"/>
           </a:p>
@@ -13164,7 +13164,7 @@
           <a:p>
             <a:fld id="{0C9F6CE3-EA10-4BD8-B1B5-D51137E37B62}" type="datetime1">
               <a:rPr lang="de-DE" smtClean="0"/>
-              <a:t>06.06.2025</a:t>
+              <a:t>12.06.2025</a:t>
             </a:fld>
             <a:endParaRPr lang="de-DE" dirty="0"/>
           </a:p>
@@ -14268,7 +14268,7 @@
           <a:p>
             <a:fld id="{0C9F6CE3-EA10-4BD8-B1B5-D51137E37B62}" type="datetime1">
               <a:rPr lang="de-DE" smtClean="0"/>
-              <a:t>06.06.2025</a:t>
+              <a:t>12.06.2025</a:t>
             </a:fld>
             <a:endParaRPr lang="de-DE" dirty="0"/>
           </a:p>
@@ -14330,6 +14330,77 @@
               <a:t>4</a:t>
             </a:fld>
             <a:endParaRPr lang="de-DE" dirty="0"/>
+          </a:p>
+        </p:txBody>
+      </p:sp>
+      <p:sp>
+        <p:nvSpPr>
+          <p:cNvPr id="8" name="Textfeld 7">
+            <a:extLst>
+              <a:ext uri="{FF2B5EF4-FFF2-40B4-BE49-F238E27FC236}">
+                <a16:creationId xmlns:a16="http://schemas.microsoft.com/office/drawing/2014/main" id="{94CFE297-5E64-A6F8-F207-08154DB95803}"/>
+              </a:ext>
+            </a:extLst>
+          </p:cNvPr>
+          <p:cNvSpPr txBox="1"/>
+          <p:nvPr/>
+        </p:nvSpPr>
+        <p:spPr>
+          <a:xfrm rot="21212090">
+            <a:off x="8988836" y="964156"/>
+            <a:ext cx="2319382" cy="738664"/>
+          </a:xfrm>
+          <a:prstGeom prst="rect">
+            <a:avLst/>
+          </a:prstGeom>
+          <a:solidFill>
+            <a:schemeClr val="accent1">
+              <a:lumMod val="60000"/>
+              <a:lumOff val="40000"/>
+            </a:schemeClr>
+          </a:solidFill>
+          <a:effectLst>
+            <a:outerShdw blurRad="50800" dist="38100" dir="2700000" algn="tl" rotWithShape="0">
+              <a:prstClr val="black">
+                <a:alpha val="40000"/>
+              </a:prstClr>
+            </a:outerShdw>
+          </a:effectLst>
+        </p:spPr>
+        <p:txBody>
+          <a:bodyPr wrap="square" rtlCol="0">
+            <a:spAutoFit/>
+          </a:bodyPr>
+          <a:lstStyle/>
+          <a:p>
+            <a:r>
+              <a:rPr lang="de-DE" sz="1400" dirty="0">
+                <a:latin typeface="Open Sans SemiBold" panose="020B0706030804020204" pitchFamily="34" charset="0"/>
+                <a:ea typeface="Open Sans SemiBold" panose="020B0706030804020204" pitchFamily="34" charset="0"/>
+                <a:cs typeface="Open Sans SemiBold" panose="020B0706030804020204" pitchFamily="34" charset="0"/>
+              </a:rPr>
+              <a:t>Besonderheit 2. Dojo</a:t>
+            </a:r>
+          </a:p>
+          <a:p>
+            <a:r>
+              <a:rPr lang="de-DE" sz="1400" dirty="0">
+                <a:latin typeface="Open Sans Light" panose="020B0306030504020204" pitchFamily="34" charset="0"/>
+                <a:ea typeface="Open Sans Light" panose="020B0306030504020204" pitchFamily="34" charset="0"/>
+                <a:cs typeface="Open Sans Light" panose="020B0306030504020204" pitchFamily="34" charset="0"/>
+              </a:rPr>
+              <a:t>KI-Agent dauerhaft Driver</a:t>
+            </a:r>
+          </a:p>
+          <a:p>
+            <a:r>
+              <a:rPr lang="de-DE" sz="1400" dirty="0">
+                <a:latin typeface="Open Sans Light" panose="020B0306030504020204" pitchFamily="34" charset="0"/>
+                <a:ea typeface="Open Sans Light" panose="020B0306030504020204" pitchFamily="34" charset="0"/>
+                <a:cs typeface="Open Sans Light" panose="020B0306030504020204" pitchFamily="34" charset="0"/>
+              </a:rPr>
+              <a:t>Wir dauerhaft Navigatoren</a:t>
+            </a:r>
           </a:p>
         </p:txBody>
       </p:sp>
@@ -14761,6 +14832,42 @@
                             </p:childTnLst>
                           </p:cTn>
                         </p:par>
+                        <p:par>
+                          <p:cTn id="33" fill="hold">
+                            <p:stCondLst>
+                              <p:cond delay="0"/>
+                            </p:stCondLst>
+                            <p:childTnLst>
+                              <p:par>
+                                <p:cTn id="34" presetID="1" presetClass="entr" presetSubtype="0" fill="hold" grpId="0" nodeType="afterEffect">
+                                  <p:stCondLst>
+                                    <p:cond delay="250"/>
+                                  </p:stCondLst>
+                                  <p:childTnLst>
+                                    <p:set>
+                                      <p:cBhvr>
+                                        <p:cTn id="35" dur="1" fill="hold">
+                                          <p:stCondLst>
+                                            <p:cond delay="9"/>
+                                          </p:stCondLst>
+                                        </p:cTn>
+                                        <p:tgtEl>
+                                          <p:spTgt spid="8"/>
+                                        </p:tgtEl>
+                                        <p:attrNameLst>
+                                          <p:attrName>style.visibility</p:attrName>
+                                        </p:attrNameLst>
+                                      </p:cBhvr>
+                                      <p:to>
+                                        <p:strVal val="visible"/>
+                                      </p:to>
+                                    </p:set>
+                                  </p:childTnLst>
+                                </p:cTn>
+                              </p:par>
+                            </p:childTnLst>
+                          </p:cTn>
+                        </p:par>
                       </p:childTnLst>
                     </p:cTn>
                   </p:par>
@@ -14785,6 +14892,9 @@
         </p:cTn>
       </p:par>
     </p:tnLst>
+    <p:bldLst>
+      <p:bldP spid="8" grpId="0" animBg="1"/>
+    </p:bldLst>
   </p:timing>
 </p:sld>
 </file>
@@ -15188,7 +15298,7 @@
           <a:p>
             <a:fld id="{0C9F6CE3-EA10-4BD8-B1B5-D51137E37B62}" type="datetime1">
               <a:rPr lang="de-DE" smtClean="0"/>
-              <a:t>06.06.2025</a:t>
+              <a:t>12.06.2025</a:t>
             </a:fld>
             <a:endParaRPr lang="de-DE" dirty="0"/>
           </a:p>
@@ -16070,7 +16180,7 @@
           <a:p>
             <a:fld id="{0C9F6CE3-EA10-4BD8-B1B5-D51137E37B62}" type="datetime1">
               <a:rPr lang="de-DE" smtClean="0"/>
-              <a:t>06.06.2025</a:t>
+              <a:t>12.06.2025</a:t>
             </a:fld>
             <a:endParaRPr lang="de-DE" dirty="0"/>
           </a:p>
@@ -17307,64 +17417,15 @@
 </file>
 
 <file path=customXml/item1.xml><?xml version="1.0" encoding="utf-8"?>
-<p:properties xmlns:p="http://schemas.microsoft.com/office/2006/metadata/properties" xmlns:xsi="http://www.w3.org/2001/XMLSchema-instance" xmlns:pc="http://schemas.microsoft.com/office/infopath/2007/PartnerControls">
-  <documentManagement>
-    <_dlc_DocId xmlns="3ba2c390-782e-48d2-92a4-4ceacf62dc83">SNID-180-47</_dlc_DocId>
-    <_dlc_DocIdUrl xmlns="3ba2c390-782e-48d2-92a4-4ceacf62dc83">
-      <Url>https://intranet.sn-invent.de/iqm/_layouts/15/DocIdRedir.aspx?ID=SNID-180-47</Url>
-      <Description>SNID-180-47</Description>
-    </_dlc_DocIdUrl>
-    <Prozessthema xmlns="3ba2c390-782e-48d2-92a4-4ceacf62dc83">./.</Prozessthema>
-    <alle xmlns="b5c6ba39-e055-4528-8d96-942d43fd41f6">true</alle>
-    <Ablageort xmlns="b5c6ba39-e055-4528-8d96-942d43fd41f6" xsi:nil="true"/>
-    <DLCPolicyLabelClientValue xmlns="1561a55d-4589-43de-94bb-8dded3e84ec0" xsi:nil="true"/>
-    <Archiv xmlns="b5c6ba39-e055-4528-8d96-942d43fd41f6">false</Archiv>
-    <DLCPolicyLabelLock xmlns="1561a55d-4589-43de-94bb-8dded3e84ec0" xsi:nil="true"/>
-    <VA xmlns="b5c6ba39-e055-4528-8d96-942d43fd41f6" xsi:nil="true"/>
-    <Vers_x002e_ xmlns="b5c6ba39-e055-4528-8d96-942d43fd41f6" xsi:nil="true"/>
-    <Besitzer xmlns="b5c6ba39-e055-4528-8d96-942d43fd41f6">
-      <UserInfo>
-        <DisplayName>Heyne, Nicole</DisplayName>
-        <AccountId>147</AccountId>
-        <AccountType/>
-      </UserInfo>
-    </Besitzer>
-    <Speichername xmlns="b5c6ba39-e055-4528-8d96-942d43fd41f6">VI07-003 Vorlage Präsentation</Speichername>
-    <Archivierungsgrund xmlns="1561a55d-4589-43de-94bb-8dded3e84ec0" xsi:nil="true"/>
-    <Prozessgruppe xmlns="3ba2c390-782e-48d2-92a4-4ceacf62dc83">Marketing</Prozessgruppe>
-    <Frist xmlns="b5c6ba39-e055-4528-8d96-942d43fd41f6">10</Frist>
-    <VI xmlns="b5c6ba39-e055-4528-8d96-942d43fd41f6">VI07-035</VI>
-    <Kunde xmlns="b5c6ba39-e055-4528-8d96-942d43fd41f6">Geben Sie Auswahl Nr. 1 ein</Kunde>
-    <DLCPolicyLabelValue xmlns="1561a55d-4589-43de-94bb-8dded3e84ec0">v.11.0</DLCPolicyLabelValue>
-  </documentManagement>
-</p:properties>
+<?mso-contentType ?>
+<FormTemplates xmlns="http://schemas.microsoft.com/sharepoint/v3/contenttype/forms">
+  <Display>DocumentLibraryForm</Display>
+  <Edit>DocumentLibraryForm</Edit>
+  <New>DocumentLibraryForm</New>
+</FormTemplates>
 </file>
 
 <file path=customXml/item2.xml><?xml version="1.0" encoding="utf-8"?>
-<?mso-contentType ?>
-<p:Policy xmlns:p="office.server.policy" id="" local="true">
-  <p:Name>Dokument</p:Name>
-  <p:Description/>
-  <p:Statement/>
-  <p:PolicyItems>
-    <p:PolicyItem featureId="Microsoft.Office.RecordsManagement.PolicyFeatures.PolicyLabel" staticId="0x010100EF5765CEE729E1418BE065284ADE3D31|2097993778" UniqueId="018cb3dd-2760-4978-a79e-fe94012d8686">
-      <p:Name>Bezeichnungen</p:Name>
-      <p:Description>Generiert Bezeichnungen, die in Microsoft Office-Dokumente eingefügt werden können, um sicherzustellen, dass Dokumenteigenschaften oder sonstige wichtige Informationen beim Drucken von Dokumenten enthalten sind. Bezeichnungen können auch für die Suche nach Dokumenten verwendet werden.</p:Description>
-      <p:CustomData>
-        <label>
-          <properties>
-            <lock>True</lock>
-          </properties>
-          <segment type="literal">v.</segment>
-          <segment type="metadata">_UIVersionString</segment>
-        </label>
-      </p:CustomData>
-    </p:PolicyItem>
-  </p:PolicyItems>
-</p:Policy>
-</file>
-
-<file path=customXml/item3.xml><?xml version="1.0" encoding="utf-8"?>
 <ct:contentTypeSchema xmlns:ct="http://schemas.microsoft.com/office/2006/metadata/contentType" xmlns:ma="http://schemas.microsoft.com/office/2006/metadata/properties/metaAttributes" ct:_="" ma:_="" ma:contentTypeName="Dokument" ma:contentTypeID="0x010100EF5765CEE729E1418BE065284ADE3D31" ma:contentTypeVersion="29" ma:contentTypeDescription="Ein neues Dokument erstellen." ma:contentTypeScope="" ma:versionID="3d50e400cca5a7bd800a74eb9a530f8f">
   <xsd:schema xmlns:xsd="http://www.w3.org/2001/XMLSchema" xmlns:xs="http://www.w3.org/2001/XMLSchema" xmlns:p="http://schemas.microsoft.com/office/2006/metadata/properties" xmlns:ns1="http://schemas.microsoft.com/sharepoint/v3" xmlns:ns2="b5c6ba39-e055-4528-8d96-942d43fd41f6" xmlns:ns3="3ba2c390-782e-48d2-92a4-4ceacf62dc83" xmlns:ns4="1561a55d-4589-43de-94bb-8dded3e84ec0" targetNamespace="http://schemas.microsoft.com/office/2006/metadata/properties" ma:root="true" ma:fieldsID="5a6f0763cb74c2d9ba07ecaec821d4b1" ns1:_="" ns2:_="" ns3:_="" ns4:_="">
     <xsd:import namespace="http://schemas.microsoft.com/sharepoint/v3"/>
@@ -17709,13 +17770,62 @@
 </ct:contentTypeSchema>
 </file>
 
+<file path=customXml/item3.xml><?xml version="1.0" encoding="utf-8"?>
+<?mso-contentType ?>
+<p:Policy xmlns:p="office.server.policy" id="" local="true">
+  <p:Name>Dokument</p:Name>
+  <p:Description/>
+  <p:Statement/>
+  <p:PolicyItems>
+    <p:PolicyItem featureId="Microsoft.Office.RecordsManagement.PolicyFeatures.PolicyLabel" staticId="0x010100EF5765CEE729E1418BE065284ADE3D31|2097993778" UniqueId="018cb3dd-2760-4978-a79e-fe94012d8686">
+      <p:Name>Bezeichnungen</p:Name>
+      <p:Description>Generiert Bezeichnungen, die in Microsoft Office-Dokumente eingefügt werden können, um sicherzustellen, dass Dokumenteigenschaften oder sonstige wichtige Informationen beim Drucken von Dokumenten enthalten sind. Bezeichnungen können auch für die Suche nach Dokumenten verwendet werden.</p:Description>
+      <p:CustomData>
+        <label>
+          <properties>
+            <lock>True</lock>
+          </properties>
+          <segment type="literal">v.</segment>
+          <segment type="metadata">_UIVersionString</segment>
+        </label>
+      </p:CustomData>
+    </p:PolicyItem>
+  </p:PolicyItems>
+</p:Policy>
+</file>
+
 <file path=customXml/item4.xml><?xml version="1.0" encoding="utf-8"?>
-<?mso-contentType ?>
-<FormTemplates xmlns="http://schemas.microsoft.com/sharepoint/v3/contenttype/forms">
-  <Display>DocumentLibraryForm</Display>
-  <Edit>DocumentLibraryForm</Edit>
-  <New>DocumentLibraryForm</New>
-</FormTemplates>
+<p:properties xmlns:p="http://schemas.microsoft.com/office/2006/metadata/properties" xmlns:xsi="http://www.w3.org/2001/XMLSchema-instance" xmlns:pc="http://schemas.microsoft.com/office/infopath/2007/PartnerControls">
+  <documentManagement>
+    <_dlc_DocId xmlns="3ba2c390-782e-48d2-92a4-4ceacf62dc83">SNID-180-47</_dlc_DocId>
+    <_dlc_DocIdUrl xmlns="3ba2c390-782e-48d2-92a4-4ceacf62dc83">
+      <Url>https://intranet.sn-invent.de/iqm/_layouts/15/DocIdRedir.aspx?ID=SNID-180-47</Url>
+      <Description>SNID-180-47</Description>
+    </_dlc_DocIdUrl>
+    <Prozessthema xmlns="3ba2c390-782e-48d2-92a4-4ceacf62dc83">./.</Prozessthema>
+    <alle xmlns="b5c6ba39-e055-4528-8d96-942d43fd41f6">true</alle>
+    <Ablageort xmlns="b5c6ba39-e055-4528-8d96-942d43fd41f6" xsi:nil="true"/>
+    <DLCPolicyLabelClientValue xmlns="1561a55d-4589-43de-94bb-8dded3e84ec0" xsi:nil="true"/>
+    <Archiv xmlns="b5c6ba39-e055-4528-8d96-942d43fd41f6">false</Archiv>
+    <DLCPolicyLabelLock xmlns="1561a55d-4589-43de-94bb-8dded3e84ec0" xsi:nil="true"/>
+    <VA xmlns="b5c6ba39-e055-4528-8d96-942d43fd41f6" xsi:nil="true"/>
+    <Vers_x002e_ xmlns="b5c6ba39-e055-4528-8d96-942d43fd41f6" xsi:nil="true"/>
+    <Besitzer xmlns="b5c6ba39-e055-4528-8d96-942d43fd41f6">
+      <UserInfo>
+        <DisplayName>Heyne, Nicole</DisplayName>
+        <AccountId>147</AccountId>
+        <AccountType/>
+      </UserInfo>
+    </Besitzer>
+    <Speichername xmlns="b5c6ba39-e055-4528-8d96-942d43fd41f6">VI07-003 Vorlage Präsentation</Speichername>
+    <Archivierungsgrund xmlns="1561a55d-4589-43de-94bb-8dded3e84ec0" xsi:nil="true"/>
+    <Prozessgruppe xmlns="3ba2c390-782e-48d2-92a4-4ceacf62dc83">Marketing</Prozessgruppe>
+    <Frist xmlns="b5c6ba39-e055-4528-8d96-942d43fd41f6">10</Frist>
+    <VI xmlns="b5c6ba39-e055-4528-8d96-942d43fd41f6">VI07-035</VI>
+    <Kunde xmlns="b5c6ba39-e055-4528-8d96-942d43fd41f6">Geben Sie Auswahl Nr. 1 ein</Kunde>
+    <DLCPolicyLabelValue xmlns="1561a55d-4589-43de-94bb-8dded3e84ec0">v.11.0</DLCPolicyLabelValue>
+  </documentManagement>
+</p:properties>
 </file>
 
 <file path=customXml/item5.xml><?xml version="1.0" encoding="utf-8"?>
@@ -17769,33 +17879,14 @@
 </file>
 
 <file path=customXml/itemProps1.xml><?xml version="1.0" encoding="utf-8"?>
-<ds:datastoreItem xmlns:ds="http://schemas.openxmlformats.org/officeDocument/2006/customXml" ds:itemID="{E5519D02-F5E4-4D45-BACB-7D3735C24017}">
+<ds:datastoreItem xmlns:ds="http://schemas.openxmlformats.org/officeDocument/2006/customXml" ds:itemID="{BF9375A8-3119-4DA8-B304-E0F5F369DCAD}">
   <ds:schemaRefs>
-    <ds:schemaRef ds:uri="http://purl.org/dc/dcmitype/"/>
-    <ds:schemaRef ds:uri="1561a55d-4589-43de-94bb-8dded3e84ec0"/>
-    <ds:schemaRef ds:uri="3ba2c390-782e-48d2-92a4-4ceacf62dc83"/>
-    <ds:schemaRef ds:uri="http://purl.org/dc/elements/1.1/"/>
-    <ds:schemaRef ds:uri="http://schemas.microsoft.com/office/2006/documentManagement/types"/>
-    <ds:schemaRef ds:uri="http://schemas.microsoft.com/sharepoint/v3"/>
-    <ds:schemaRef ds:uri="http://purl.org/dc/terms/"/>
-    <ds:schemaRef ds:uri="http://schemas.openxmlformats.org/package/2006/metadata/core-properties"/>
-    <ds:schemaRef ds:uri="b5c6ba39-e055-4528-8d96-942d43fd41f6"/>
-    <ds:schemaRef ds:uri="http://schemas.microsoft.com/office/infopath/2007/PartnerControls"/>
-    <ds:schemaRef ds:uri="http://schemas.microsoft.com/office/2006/metadata/properties"/>
-    <ds:schemaRef ds:uri="http://www.w3.org/XML/1998/namespace"/>
+    <ds:schemaRef ds:uri="http://schemas.microsoft.com/sharepoint/v3/contenttype/forms"/>
   </ds:schemaRefs>
 </ds:datastoreItem>
 </file>
 
 <file path=customXml/itemProps2.xml><?xml version="1.0" encoding="utf-8"?>
-<ds:datastoreItem xmlns:ds="http://schemas.openxmlformats.org/officeDocument/2006/customXml" ds:itemID="{1D4355BD-3339-4747-A9BA-2F7E78B26BF6}">
-  <ds:schemaRefs>
-    <ds:schemaRef ds:uri="office.server.policy"/>
-  </ds:schemaRefs>
-</ds:datastoreItem>
-</file>
-
-<file path=customXml/itemProps3.xml><?xml version="1.0" encoding="utf-8"?>
 <ds:datastoreItem xmlns:ds="http://schemas.openxmlformats.org/officeDocument/2006/customXml" ds:itemID="{BBCE9F00-598A-4817-82B0-FFE08B1F3937}">
   <ds:schemaRefs>
     <ds:schemaRef ds:uri="http://schemas.microsoft.com/office/2006/metadata/contentType"/>
@@ -17816,10 +17907,29 @@
 </ds:datastoreItem>
 </file>
 
+<file path=customXml/itemProps3.xml><?xml version="1.0" encoding="utf-8"?>
+<ds:datastoreItem xmlns:ds="http://schemas.openxmlformats.org/officeDocument/2006/customXml" ds:itemID="{1D4355BD-3339-4747-A9BA-2F7E78B26BF6}">
+  <ds:schemaRefs>
+    <ds:schemaRef ds:uri="office.server.policy"/>
+  </ds:schemaRefs>
+</ds:datastoreItem>
+</file>
+
 <file path=customXml/itemProps4.xml><?xml version="1.0" encoding="utf-8"?>
-<ds:datastoreItem xmlns:ds="http://schemas.openxmlformats.org/officeDocument/2006/customXml" ds:itemID="{BF9375A8-3119-4DA8-B304-E0F5F369DCAD}">
+<ds:datastoreItem xmlns:ds="http://schemas.openxmlformats.org/officeDocument/2006/customXml" ds:itemID="{E5519D02-F5E4-4D45-BACB-7D3735C24017}">
   <ds:schemaRefs>
-    <ds:schemaRef ds:uri="http://schemas.microsoft.com/sharepoint/v3/contenttype/forms"/>
+    <ds:schemaRef ds:uri="http://purl.org/dc/dcmitype/"/>
+    <ds:schemaRef ds:uri="1561a55d-4589-43de-94bb-8dded3e84ec0"/>
+    <ds:schemaRef ds:uri="3ba2c390-782e-48d2-92a4-4ceacf62dc83"/>
+    <ds:schemaRef ds:uri="http://purl.org/dc/elements/1.1/"/>
+    <ds:schemaRef ds:uri="http://schemas.microsoft.com/office/2006/documentManagement/types"/>
+    <ds:schemaRef ds:uri="http://schemas.microsoft.com/sharepoint/v3"/>
+    <ds:schemaRef ds:uri="http://purl.org/dc/terms/"/>
+    <ds:schemaRef ds:uri="http://schemas.openxmlformats.org/package/2006/metadata/core-properties"/>
+    <ds:schemaRef ds:uri="b5c6ba39-e055-4528-8d96-942d43fd41f6"/>
+    <ds:schemaRef ds:uri="http://schemas.microsoft.com/office/infopath/2007/PartnerControls"/>
+    <ds:schemaRef ds:uri="http://schemas.microsoft.com/office/2006/metadata/properties"/>
+    <ds:schemaRef ds:uri="http://www.w3.org/XML/1998/namespace"/>
   </ds:schemaRefs>
 </ds:datastoreItem>
 </file>
